--- a/assets/pptx/catalog-182.pptx
+++ b/assets/pptx/catalog-182.pptx
@@ -3303,7 +3303,7 @@
                 <a:ea typeface="Ebrima"/>
                 <a:cs typeface="Ebrima"/>
               </a:rPr>
-              <a:t>አሄ አትለቀኝም በቃ (2x)</a:t>
+              <a:t>አሄ አትለቀኝም በቃ 2x</a:t>
             </a:r>
           </a:p>
         </p:txBody>
@@ -3424,7 +3424,7 @@
                 <a:ea typeface="Ebrima"/>
                 <a:cs typeface="Ebrima"/>
               </a:rPr>
-              <a:t>ዘላለሙ አያሰጋው (2x)</a:t>
+              <a:t>ዘላለሙ አያሰጋው 2x</a:t>
             </a:r>
           </a:p>
         </p:txBody>
@@ -3491,7 +3491,7 @@
                 <a:ea typeface="Ebrima"/>
                 <a:cs typeface="Ebrima"/>
               </a:rPr>
-              <a:t>አባትዬ የእኔ ወዳጅ (2x)</a:t>
+              <a:t>አባትዬ የእኔ ወዳጅ 2x</a:t>
             </a:r>
           </a:p>
           <a:p>
@@ -3509,7 +3509,7 @@
                 <a:ea typeface="Ebrima"/>
                 <a:cs typeface="Ebrima"/>
               </a:rPr>
-              <a:t>ኑሮዬ በአንተ እጅ (2x)</a:t>
+              <a:t>ኑሮዬ በአንተ እጅ 2x</a:t>
             </a:r>
           </a:p>
           <a:p>
@@ -3545,7 +3545,7 @@
                 <a:ea typeface="Ebrima"/>
                 <a:cs typeface="Ebrima"/>
               </a:rPr>
-              <a:t>በጥላህ ሥር ነው ማደሪያዬ (2x)</a:t>
+              <a:t>በጥላህ ሥር ነው ማደሪያዬ 2x</a:t>
             </a:r>
           </a:p>
         </p:txBody>
@@ -3908,7 +3908,7 @@
                 <a:ea typeface="Ebrima"/>
                 <a:cs typeface="Ebrima"/>
               </a:rPr>
-              <a:t>ዘላለሙ አያሰጋው (2x)</a:t>
+              <a:t>ዘላለሙ አያሰጋው 2x</a:t>
             </a:r>
           </a:p>
         </p:txBody>
@@ -3975,7 +3975,7 @@
                 <a:ea typeface="Ebrima"/>
                 <a:cs typeface="Ebrima"/>
               </a:rPr>
-              <a:t>አባትዬ የእኔ ወዳጅ (2x)</a:t>
+              <a:t>አባትዬ የእኔ ወዳጅ 2x</a:t>
             </a:r>
           </a:p>
           <a:p>
@@ -3993,7 +3993,7 @@
                 <a:ea typeface="Ebrima"/>
                 <a:cs typeface="Ebrima"/>
               </a:rPr>
-              <a:t>ኑሮዬ በአንተ እጅ (2x)</a:t>
+              <a:t>ኑሮዬ በአንተ እጅ 2x</a:t>
             </a:r>
           </a:p>
           <a:p>
@@ -4029,7 +4029,7 @@
                 <a:ea typeface="Ebrima"/>
                 <a:cs typeface="Ebrima"/>
               </a:rPr>
-              <a:t>በጥላህ ሥር ነው ማደሪያዬ (2x)</a:t>
+              <a:t>በጥላህ ሥር ነው ማደሪያዬ 2x</a:t>
             </a:r>
           </a:p>
         </p:txBody>
